--- a/docs/Презентация_AD_Blood_Stage.pptx
+++ b/docs/Презентация_AD_Blood_Stage.pptx
@@ -3247,7 +3247,7 @@
                   <a:srgbClr val="2C3E50"/>
                 </a:solidFill>
               </a:rPr>
-              <a:t>• Честный macro-AUC = 0.75 (95% ДИ 0.71–0.79).</a:t>
+              <a:t>• macro-AUC (кросс-валидация) = 0.75 (95% ДИ 0.71–0.79).</a:t>
             </a:r>
           </a:p>
           <a:p>
@@ -3277,7 +3277,7 @@
                   <a:srgbClr val="2C3E50"/>
                 </a:solidFill>
               </a:rPr>
-              <a:t>    – Норму от болезни отделяет уверенно; MCI — труднее (честно показано).</a:t>
+              <a:t>    – Норму от болезни отделяет уверенно; MCI — труднее (показано прямо).</a:t>
             </a:r>
           </a:p>
           <a:p>
@@ -3292,7 +3292,7 @@
                   <a:srgbClr val="2C3E50"/>
                 </a:solidFill>
               </a:rPr>
-              <a:t>• Утечки/переобучения нет (наивный ≈ честный отбор).</a:t>
+              <a:t>• Утечки/переобучения нет (наивный ≈ корректный отбор).</a:t>
             </a:r>
           </a:p>
         </p:txBody>
@@ -3486,7 +3486,7 @@
                   <a:srgbClr val="2C3E50"/>
                 </a:solidFill>
               </a:rPr>
-              <a:t>• Честная методология: метрики по классам, доверительные интервалы.</a:t>
+              <a:t>• Методология без утечки: метрики по классам, доверительные интервалы.</a:t>
             </a:r>
           </a:p>
           <a:p>
@@ -3784,7 +3784,7 @@
                   <a:srgbClr val="2C3E50"/>
                 </a:solidFill>
               </a:rPr>
-              <a:t>• Прежняя версия: только «болен/здоров» по клеткам мозга.</a:t>
+              <a:t>• Обоснование: диагноз ставят поздно — нужно ловить окно MCI.</a:t>
             </a:r>
           </a:p>
           <a:p>
@@ -3799,7 +3799,22 @@
                   <a:srgbClr val="2C3E50"/>
                 </a:solidFill>
               </a:rPr>
-              <a:t>    – Минусы: нет промежуточной стадии; биопсию мозга живому не сделать.</a:t>
+              <a:t>    – Существующие методы: МРТ/ПЭТ дороги, ткань мозга у живого недоступна.</a:t>
+            </a:r>
+          </a:p>
+          <a:p>
+            <a:pPr lvl="1">
+              <a:spcAft>
+                <a:spcPts val="600"/>
+              </a:spcAft>
+            </a:pPr>
+            <a:r>
+              <a:rPr sz="1700">
+                <a:solidFill>
+                  <a:srgbClr val="2C3E50"/>
+                </a:solidFill>
+              </a:rPr>
+              <a:t>    – Кровь — неинвазивно, дёшево, несёт ранний молекулярный сигнал.</a:t>
             </a:r>
           </a:p>
           <a:p>
@@ -3814,7 +3829,52 @@
                   <a:srgbClr val="2C3E50"/>
                 </a:solidFill>
               </a:rPr>
-              <a:t>• Решение: экспрессия генов в КРОВИ — у живого пациента, есть все 3 стадии.</a:t>
+              <a:t>• В литературе каждый подход закрывает лишь часть задачи:</a:t>
+            </a:r>
+          </a:p>
+          <a:p>
+            <a:pPr lvl="1">
+              <a:spcAft>
+                <a:spcPts val="600"/>
+              </a:spcAft>
+            </a:pPr>
+            <a:r>
+              <a:rPr sz="1700">
+                <a:solidFill>
+                  <a:srgbClr val="2C3E50"/>
+                </a:solidFill>
+              </a:rPr>
+              <a:t>    – — по генам, но только «болен/здоров» (напр. AITeQ);</a:t>
+            </a:r>
+          </a:p>
+          <a:p>
+            <a:pPr lvl="1">
+              <a:spcAft>
+                <a:spcPts val="600"/>
+              </a:spcAft>
+            </a:pPr>
+            <a:r>
+              <a:rPr sz="1700">
+                <a:solidFill>
+                  <a:srgbClr val="2C3E50"/>
+                </a:solidFill>
+              </a:rPr>
+              <a:t>    – — 3 стадии, но по МРТ или клиническим шкалам, не по генам;</a:t>
+            </a:r>
+          </a:p>
+          <a:p>
+            <a:pPr lvl="1">
+              <a:spcAft>
+                <a:spcPts val="600"/>
+              </a:spcAft>
+            </a:pPr>
+            <a:r>
+              <a:rPr sz="1700">
+                <a:solidFill>
+                  <a:srgbClr val="2C3E50"/>
+                </a:solidFill>
+              </a:rPr>
+              <a:t>    – — гены+стадии+объяснение, но без сайта и на закрытых данных (c-Triadem).</a:t>
             </a:r>
           </a:p>
           <a:p>
@@ -3829,22 +3889,7 @@
                   <a:srgbClr val="2C3E50"/>
                 </a:solidFill>
               </a:rPr>
-              <a:t>• Сравнила ~10 аналогов: по отдельности всё есть, вместе — ни у кого.</a:t>
-            </a:r>
-          </a:p>
-          <a:p>
-            <a:pPr>
-              <a:spcAft>
-                <a:spcPts val="600"/>
-              </a:spcAft>
-            </a:pPr>
-            <a:r>
-              <a:rPr sz="2000">
-                <a:solidFill>
-                  <a:srgbClr val="2C3E50"/>
-                </a:solidFill>
-              </a:rPr>
-              <a:t>• Новизна = соединение: гены крови + 3 стадии + минимальная панель +</a:t>
+              <a:t>• Новизна — впервые ВСЁ вместе: гены крови + 3 стадии + мин. панель</a:t>
             </a:r>
           </a:p>
           <a:p>
@@ -3859,7 +3904,7 @@
                   <a:srgbClr val="2C3E50"/>
                 </a:solidFill>
               </a:rPr>
-              <a:t>    – интерпретируемость + рабочий сайт + честная валидация (открытые данные).</a:t>
+              <a:t>    – + объяснение + рабочий сайт + валидация без утечки на открытых данных.</a:t>
             </a:r>
           </a:p>
         </p:txBody>
@@ -4008,7 +4053,7 @@
                   <a:srgbClr val="2C3E50"/>
                 </a:solidFill>
               </a:rPr>
-              <a:t>• Ожидаемый результат: честный macro-AUC ≈ 0.75.</a:t>
+              <a:t>• Ожидаемый результат: macro-AUC ≈ 0.75 (кросс-валидация).</a:t>
             </a:r>
           </a:p>
         </p:txBody>
@@ -4157,7 +4202,7 @@
                   <a:srgbClr val="2C3E50"/>
                 </a:solidFill>
               </a:rPr>
-              <a:t>    – Честная CV: отбор и масштабирование ВНУТРИ фолдов (без утечки).</a:t>
+              <a:t>    – Без утечки: отбор и масштабирование ВНУТРИ фолдов кросс-валидации.</a:t>
             </a:r>
           </a:p>
           <a:p>
@@ -4455,7 +4500,7 @@
                   <a:srgbClr val="2C3E50"/>
                 </a:solidFill>
               </a:rPr>
-              <a:t>• biomarker_panel.py — ЯДРО: отбор панели, честная CV, модель, SHAP.</a:t>
+              <a:t>• biomarker_panel.py — ЯДРО: отбор панели, кросс-валидация, модель, SHAP.</a:t>
             </a:r>
           </a:p>
           <a:p>
@@ -4558,7 +4603,7 @@
         <p:spPr>
           <a:xfrm>
             <a:off x="2670505" y="1280160"/>
-            <a:ext cx="5642854" cy="5303520"/>
+            <a:ext cx="5737726" cy="5303520"/>
           </a:xfrm>
           <a:prstGeom prst="rect">
             <a:avLst/>
@@ -4582,7 +4627,7 @@
         <p:spPr>
           <a:xfrm>
             <a:off x="6233007" y="1280160"/>
-            <a:ext cx="3228799" cy="5303520"/>
+            <a:ext cx="3259639" cy="5303520"/>
           </a:xfrm>
           <a:prstGeom prst="rect">
             <a:avLst/>
@@ -4657,7 +4702,7 @@
         <p:spPr>
           <a:xfrm>
             <a:off x="4423410" y="1280160"/>
-            <a:ext cx="2913003" cy="5394960"/>
+            <a:ext cx="2885631" cy="5394960"/>
           </a:xfrm>
           <a:prstGeom prst="rect">
             <a:avLst/>

--- a/docs/Презентация_AD_Blood_Stage.pptx
+++ b/docs/Презентация_AD_Blood_Stage.pptx
@@ -4084,8 +4084,8 @@
         </p:nvSpPr>
         <p:spPr>
           <a:xfrm>
-            <a:off x="548640" y="320040"/>
-            <a:ext cx="11064240" cy="914400"/>
+            <a:off x="457200" y="164592"/>
+            <a:ext cx="11247120" cy="777240"/>
           </a:xfrm>
           <a:prstGeom prst="rect">
             <a:avLst/>
@@ -4111,14 +4111,90 @@
       </p:sp>
       <p:sp>
         <p:nvSpPr>
-          <p:cNvPr id="3" name="TextBox 2"/>
+          <p:cNvPr id="3" name="Rounded Rectangle 2"/>
+          <p:cNvSpPr/>
+          <p:nvPr/>
+        </p:nvSpPr>
+        <p:spPr>
+          <a:xfrm>
+            <a:off x="792327" y="2148840"/>
+            <a:ext cx="1901952" cy="2103120"/>
+          </a:xfrm>
+          <a:prstGeom prst="roundRect">
+            <a:avLst/>
+          </a:prstGeom>
+          <a:solidFill>
+            <a:srgbClr val="2980B9"/>
+          </a:solidFill>
+          <a:ln w="6350">
+            <a:solidFill>
+              <a:srgbClr val="2980B9"/>
+            </a:solidFill>
+          </a:ln>
+        </p:spPr>
+        <p:style>
+          <a:lnRef idx="1">
+            <a:schemeClr val="accent1"/>
+          </a:lnRef>
+          <a:fillRef idx="3">
+            <a:schemeClr val="accent1"/>
+          </a:fillRef>
+          <a:effectRef idx="2">
+            <a:schemeClr val="accent1"/>
+          </a:effectRef>
+          <a:fontRef idx="minor">
+            <a:schemeClr val="lt1"/>
+          </a:fontRef>
+        </p:style>
+        <p:txBody>
+          <a:bodyPr rtlCol="0" anchor="ctr" wrap="square" tIns="120000" bIns="60000" lIns="90000" rIns="90000"/>
+          <a:lstStyle/>
+          <a:p>
+            <a:pPr algn="ctr"/>
+            <a:r>
+              <a:rPr sz="1400" b="1">
+                <a:solidFill>
+                  <a:srgbClr val="FFFFFF"/>
+                </a:solidFill>
+              </a:rPr>
+              <a:t>Данные</a:t>
+            </a:r>
+          </a:p>
+          <a:p>
+            <a:pPr algn="ctr">
+              <a:spcBef>
+                <a:spcPts val="400"/>
+              </a:spcBef>
+            </a:pPr>
+            <a:r>
+              <a:rPr sz="1000">
+                <a:solidFill>
+                  <a:srgbClr val="E8F0FF"/>
+                </a:solidFill>
+              </a:rPr>
+              <a:t>GSE63060</a:t>
+            </a:r>
+            <a:br/>
+            <a:r>
+              <a:t>329 образцов крови</a:t>
+            </a:r>
+            <a:br/>
+            <a:r>
+              <a:t>(кровь, открытые)</a:t>
+            </a:r>
+          </a:p>
+        </p:txBody>
+      </p:sp>
+      <p:sp>
+        <p:nvSpPr>
+          <p:cNvPr id="4" name="TextBox 3"/>
           <p:cNvSpPr txBox="1"/>
           <p:nvPr/>
         </p:nvSpPr>
         <p:spPr>
           <a:xfrm>
-            <a:off x="640080" y="1371600"/>
-            <a:ext cx="10972800" cy="5029200"/>
+            <a:off x="2694279" y="2990088"/>
+            <a:ext cx="347472" cy="365760"/>
           </a:xfrm>
           <a:prstGeom prst="rect">
             <a:avLst/>
@@ -4126,98 +4202,443 @@
           <a:noFill/>
         </p:spPr>
         <p:txBody>
-          <a:bodyPr wrap="square">
+          <a:bodyPr wrap="none">
             <a:spAutoFit/>
           </a:bodyPr>
           <a:lstStyle/>
           <a:p>
-            <a:pPr>
-              <a:spcAft>
-                <a:spcPts val="600"/>
-              </a:spcAft>
+            <a:pPr algn="ctr"/>
+            <a:r>
+              <a:rPr sz="2600" b="1">
+                <a:solidFill>
+                  <a:srgbClr val="AAAAAA"/>
+                </a:solidFill>
+              </a:rPr>
+              <a:t>&gt;</a:t>
+            </a:r>
+          </a:p>
+        </p:txBody>
+      </p:sp>
+      <p:sp>
+        <p:nvSpPr>
+          <p:cNvPr id="5" name="Rounded Rectangle 4"/>
+          <p:cNvSpPr/>
+          <p:nvPr/>
+        </p:nvSpPr>
+        <p:spPr>
+          <a:xfrm>
+            <a:off x="2968599" y="2148840"/>
+            <a:ext cx="1901952" cy="2103120"/>
+          </a:xfrm>
+          <a:prstGeom prst="roundRect">
+            <a:avLst/>
+          </a:prstGeom>
+          <a:solidFill>
+            <a:srgbClr val="27AE60"/>
+          </a:solidFill>
+          <a:ln w="6350">
+            <a:solidFill>
+              <a:srgbClr val="27AE60"/>
+            </a:solidFill>
+          </a:ln>
+        </p:spPr>
+        <p:style>
+          <a:lnRef idx="1">
+            <a:schemeClr val="accent1"/>
+          </a:lnRef>
+          <a:fillRef idx="3">
+            <a:schemeClr val="accent1"/>
+          </a:fillRef>
+          <a:effectRef idx="2">
+            <a:schemeClr val="accent1"/>
+          </a:effectRef>
+          <a:fontRef idx="minor">
+            <a:schemeClr val="lt1"/>
+          </a:fontRef>
+        </p:style>
+        <p:txBody>
+          <a:bodyPr rtlCol="0" anchor="ctr" wrap="square" tIns="120000" bIns="60000" lIns="90000" rIns="90000"/>
+          <a:lstStyle/>
+          <a:p>
+            <a:pPr algn="ctr"/>
+            <a:r>
+              <a:rPr sz="1400" b="1">
+                <a:solidFill>
+                  <a:srgbClr val="FFFFFF"/>
+                </a:solidFill>
+              </a:rPr>
+              <a:t>Загрузка</a:t>
+            </a:r>
+          </a:p>
+          <a:p>
+            <a:pPr algn="ctr">
+              <a:spcBef>
+                <a:spcPts val="400"/>
+              </a:spcBef>
             </a:pPr>
             <a:r>
-              <a:rPr sz="2000">
-                <a:solidFill>
-                  <a:srgbClr val="2C3E50"/>
-                </a:solidFill>
-              </a:rPr>
-              <a:t>• Скачивание GSE63060 (series matrix + аннотация GPL6947).</a:t>
-            </a:r>
-          </a:p>
-          <a:p>
-            <a:pPr>
-              <a:spcAft>
-                <a:spcPts val="600"/>
-              </a:spcAft>
+              <a:rPr sz="1000">
+                <a:solidFill>
+                  <a:srgbClr val="E8F0FF"/>
+                </a:solidFill>
+              </a:rPr>
+              <a:t>probe  ген</a:t>
+            </a:r>
+            <a:br/>
+            <a:r>
+              <a:t>метки CTL / MCI / AD</a:t>
+            </a:r>
+          </a:p>
+        </p:txBody>
+      </p:sp>
+      <p:sp>
+        <p:nvSpPr>
+          <p:cNvPr id="6" name="TextBox 5"/>
+          <p:cNvSpPr txBox="1"/>
+          <p:nvPr/>
+        </p:nvSpPr>
+        <p:spPr>
+          <a:xfrm>
+            <a:off x="4870551" y="2990088"/>
+            <a:ext cx="347472" cy="365760"/>
+          </a:xfrm>
+          <a:prstGeom prst="rect">
+            <a:avLst/>
+          </a:prstGeom>
+          <a:noFill/>
+        </p:spPr>
+        <p:txBody>
+          <a:bodyPr wrap="none">
+            <a:spAutoFit/>
+          </a:bodyPr>
+          <a:lstStyle/>
+          <a:p>
+            <a:pPr algn="ctr"/>
+            <a:r>
+              <a:rPr sz="2600" b="1">
+                <a:solidFill>
+                  <a:srgbClr val="AAAAAA"/>
+                </a:solidFill>
+              </a:rPr>
+              <a:t>&gt;</a:t>
+            </a:r>
+          </a:p>
+        </p:txBody>
+      </p:sp>
+      <p:sp>
+        <p:nvSpPr>
+          <p:cNvPr id="7" name="Rounded Rectangle 6"/>
+          <p:cNvSpPr/>
+          <p:nvPr/>
+        </p:nvSpPr>
+        <p:spPr>
+          <a:xfrm>
+            <a:off x="5144871" y="2148840"/>
+            <a:ext cx="1901952" cy="2103120"/>
+          </a:xfrm>
+          <a:prstGeom prst="roundRect">
+            <a:avLst/>
+          </a:prstGeom>
+          <a:solidFill>
+            <a:srgbClr val="D35A00"/>
+          </a:solidFill>
+          <a:ln w="6350">
+            <a:solidFill>
+              <a:srgbClr val="D35A00"/>
+            </a:solidFill>
+          </a:ln>
+        </p:spPr>
+        <p:style>
+          <a:lnRef idx="1">
+            <a:schemeClr val="accent1"/>
+          </a:lnRef>
+          <a:fillRef idx="3">
+            <a:schemeClr val="accent1"/>
+          </a:fillRef>
+          <a:effectRef idx="2">
+            <a:schemeClr val="accent1"/>
+          </a:effectRef>
+          <a:fontRef idx="minor">
+            <a:schemeClr val="lt1"/>
+          </a:fontRef>
+        </p:style>
+        <p:txBody>
+          <a:bodyPr rtlCol="0" anchor="ctr" wrap="square" tIns="120000" bIns="60000" lIns="90000" rIns="90000"/>
+          <a:lstStyle/>
+          <a:p>
+            <a:pPr algn="ctr"/>
+            <a:r>
+              <a:rPr sz="1400" b="1">
+                <a:solidFill>
+                  <a:srgbClr val="FFFFFF"/>
+                </a:solidFill>
+              </a:rPr>
+              <a:t>Предобработка</a:t>
+            </a:r>
+          </a:p>
+          <a:p>
+            <a:pPr algn="ctr">
+              <a:spcBef>
+                <a:spcPts val="400"/>
+              </a:spcBef>
             </a:pPr>
             <a:r>
-              <a:rPr sz="2000">
-                <a:solidFill>
-                  <a:srgbClr val="2C3E50"/>
-                </a:solidFill>
-              </a:rPr>
-              <a:t>• Перевод зондов микрочипа в гены, метки стадий CTL/MCI/AD.</a:t>
-            </a:r>
-          </a:p>
-          <a:p>
-            <a:pPr>
-              <a:spcAft>
-                <a:spcPts val="600"/>
-              </a:spcAft>
+              <a:rPr sz="1000">
+                <a:solidFill>
+                  <a:srgbClr val="E8F0FF"/>
+                </a:solidFill>
+              </a:rPr>
+              <a:t>log2, нормализация</a:t>
+            </a:r>
+            <a:br/>
+            <a:r>
+              <a:t>фильтр генов</a:t>
+            </a:r>
+          </a:p>
+        </p:txBody>
+      </p:sp>
+      <p:sp>
+        <p:nvSpPr>
+          <p:cNvPr id="8" name="TextBox 7"/>
+          <p:cNvSpPr txBox="1"/>
+          <p:nvPr/>
+        </p:nvSpPr>
+        <p:spPr>
+          <a:xfrm>
+            <a:off x="7046823" y="2990088"/>
+            <a:ext cx="347472" cy="365760"/>
+          </a:xfrm>
+          <a:prstGeom prst="rect">
+            <a:avLst/>
+          </a:prstGeom>
+          <a:noFill/>
+        </p:spPr>
+        <p:txBody>
+          <a:bodyPr wrap="none">
+            <a:spAutoFit/>
+          </a:bodyPr>
+          <a:lstStyle/>
+          <a:p>
+            <a:pPr algn="ctr"/>
+            <a:r>
+              <a:rPr sz="2600" b="1">
+                <a:solidFill>
+                  <a:srgbClr val="AAAAAA"/>
+                </a:solidFill>
+              </a:rPr>
+              <a:t>&gt;</a:t>
+            </a:r>
+          </a:p>
+        </p:txBody>
+      </p:sp>
+      <p:sp>
+        <p:nvSpPr>
+          <p:cNvPr id="9" name="Rounded Rectangle 8"/>
+          <p:cNvSpPr/>
+          <p:nvPr/>
+        </p:nvSpPr>
+        <p:spPr>
+          <a:xfrm>
+            <a:off x="7321143" y="2148840"/>
+            <a:ext cx="1901952" cy="2103120"/>
+          </a:xfrm>
+          <a:prstGeom prst="roundRect">
+            <a:avLst/>
+          </a:prstGeom>
+          <a:solidFill>
+            <a:srgbClr val="8E44AD"/>
+          </a:solidFill>
+          <a:ln w="6350">
+            <a:solidFill>
+              <a:srgbClr val="8E44AD"/>
+            </a:solidFill>
+          </a:ln>
+        </p:spPr>
+        <p:style>
+          <a:lnRef idx="1">
+            <a:schemeClr val="accent1"/>
+          </a:lnRef>
+          <a:fillRef idx="3">
+            <a:schemeClr val="accent1"/>
+          </a:fillRef>
+          <a:effectRef idx="2">
+            <a:schemeClr val="accent1"/>
+          </a:effectRef>
+          <a:fontRef idx="minor">
+            <a:schemeClr val="lt1"/>
+          </a:fontRef>
+        </p:style>
+        <p:txBody>
+          <a:bodyPr rtlCol="0" anchor="ctr" wrap="square" tIns="120000" bIns="60000" lIns="90000" rIns="90000"/>
+          <a:lstStyle/>
+          <a:p>
+            <a:pPr algn="ctr"/>
+            <a:r>
+              <a:rPr sz="1400" b="1">
+                <a:solidFill>
+                  <a:srgbClr val="FFFFFF"/>
+                </a:solidFill>
+              </a:rPr>
+              <a:t>ПАНЕЛЬ + МОДЕЛЬ</a:t>
+            </a:r>
+          </a:p>
+          <a:p>
+            <a:pPr algn="ctr">
+              <a:spcBef>
+                <a:spcPts val="400"/>
+              </a:spcBef>
             </a:pPr>
             <a:r>
-              <a:rPr sz="2000">
-                <a:solidFill>
-                  <a:srgbClr val="2C3E50"/>
-                </a:solidFill>
-              </a:rPr>
-              <a:t>• Предобработка: log2, нормализация, фильтр генов.</a:t>
-            </a:r>
-          </a:p>
-          <a:p>
-            <a:pPr>
-              <a:spcAft>
-                <a:spcPts val="600"/>
-              </a:spcAft>
+              <a:rPr sz="1000">
+                <a:solidFill>
+                  <a:srgbClr val="E8F0FF"/>
+                </a:solidFill>
+              </a:rPr>
+              <a:t>15 генов, без утечки</a:t>
+            </a:r>
+            <a:br/>
+            <a:r>
+              <a:t>кросс-валидация + SHAP</a:t>
+            </a:r>
+          </a:p>
+        </p:txBody>
+      </p:sp>
+      <p:sp>
+        <p:nvSpPr>
+          <p:cNvPr id="10" name="TextBox 9"/>
+          <p:cNvSpPr txBox="1"/>
+          <p:nvPr/>
+        </p:nvSpPr>
+        <p:spPr>
+          <a:xfrm>
+            <a:off x="9223095" y="2990088"/>
+            <a:ext cx="347472" cy="365760"/>
+          </a:xfrm>
+          <a:prstGeom prst="rect">
+            <a:avLst/>
+          </a:prstGeom>
+          <a:noFill/>
+        </p:spPr>
+        <p:txBody>
+          <a:bodyPr wrap="none">
+            <a:spAutoFit/>
+          </a:bodyPr>
+          <a:lstStyle/>
+          <a:p>
+            <a:pPr algn="ctr"/>
+            <a:r>
+              <a:rPr sz="2600" b="1">
+                <a:solidFill>
+                  <a:srgbClr val="AAAAAA"/>
+                </a:solidFill>
+              </a:rPr>
+              <a:t>&gt;</a:t>
+            </a:r>
+          </a:p>
+        </p:txBody>
+      </p:sp>
+      <p:sp>
+        <p:nvSpPr>
+          <p:cNvPr id="11" name="Rounded Rectangle 10"/>
+          <p:cNvSpPr/>
+          <p:nvPr/>
+        </p:nvSpPr>
+        <p:spPr>
+          <a:xfrm>
+            <a:off x="9497415" y="2148840"/>
+            <a:ext cx="1901952" cy="2103120"/>
+          </a:xfrm>
+          <a:prstGeom prst="roundRect">
+            <a:avLst/>
+          </a:prstGeom>
+          <a:solidFill>
+            <a:srgbClr val="1A5E7A"/>
+          </a:solidFill>
+          <a:ln w="6350">
+            <a:solidFill>
+              <a:srgbClr val="1A5E7A"/>
+            </a:solidFill>
+          </a:ln>
+        </p:spPr>
+        <p:style>
+          <a:lnRef idx="1">
+            <a:schemeClr val="accent1"/>
+          </a:lnRef>
+          <a:fillRef idx="3">
+            <a:schemeClr val="accent1"/>
+          </a:fillRef>
+          <a:effectRef idx="2">
+            <a:schemeClr val="accent1"/>
+          </a:effectRef>
+          <a:fontRef idx="minor">
+            <a:schemeClr val="lt1"/>
+          </a:fontRef>
+        </p:style>
+        <p:txBody>
+          <a:bodyPr rtlCol="0" anchor="ctr" wrap="square" tIns="120000" bIns="60000" lIns="90000" rIns="90000"/>
+          <a:lstStyle/>
+          <a:p>
+            <a:pPr algn="ctr"/>
+            <a:r>
+              <a:rPr sz="1400" b="1">
+                <a:solidFill>
+                  <a:srgbClr val="FFFFFF"/>
+                </a:solidFill>
+              </a:rPr>
+              <a:t>Веб-приложение</a:t>
+            </a:r>
+          </a:p>
+          <a:p>
+            <a:pPr algn="ctr">
+              <a:spcBef>
+                <a:spcPts val="400"/>
+              </a:spcBef>
             </a:pPr>
             <a:r>
-              <a:rPr sz="2000">
-                <a:solidFill>
-                  <a:srgbClr val="2C3E50"/>
-                </a:solidFill>
-              </a:rPr>
-              <a:t>• Отбор минимальной панели + мультиномиальная лог. регрессия.</a:t>
-            </a:r>
-          </a:p>
-          <a:p>
-            <a:pPr lvl="1">
-              <a:spcAft>
-                <a:spcPts val="600"/>
-              </a:spcAft>
-            </a:pPr>
-            <a:r>
-              <a:rPr sz="1700">
-                <a:solidFill>
-                  <a:srgbClr val="2C3E50"/>
-                </a:solidFill>
-              </a:rPr>
-              <a:t>    – Без утечки: отбор и масштабирование ВНУТРИ фолдов кросс-валидации.</a:t>
-            </a:r>
-          </a:p>
-          <a:p>
-            <a:pPr>
-              <a:spcAft>
-                <a:spcPts val="600"/>
-              </a:spcAft>
-            </a:pPr>
-            <a:r>
-              <a:rPr sz="2000">
-                <a:solidFill>
-                  <a:srgbClr val="2C3E50"/>
-                </a:solidFill>
-              </a:rPr>
-              <a:t>• Модель → веб-приложение (Streamlit): ввод генов → стадия + объяснение.</a:t>
+              <a:rPr sz="1000">
+                <a:solidFill>
+                  <a:srgbClr val="E8F0FF"/>
+                </a:solidFill>
+              </a:rPr>
+              <a:t>Streamlit</a:t>
+            </a:r>
+            <a:br/>
+            <a:r>
+              <a:t>стадия + объяснение</a:t>
+            </a:r>
+          </a:p>
+        </p:txBody>
+      </p:sp>
+      <p:sp>
+        <p:nvSpPr>
+          <p:cNvPr id="12" name="TextBox 11"/>
+          <p:cNvSpPr txBox="1"/>
+          <p:nvPr/>
+        </p:nvSpPr>
+        <p:spPr>
+          <a:xfrm>
+            <a:off x="7321143" y="4361688"/>
+            <a:ext cx="1901952" cy="347472"/>
+          </a:xfrm>
+          <a:prstGeom prst="rect">
+            <a:avLst/>
+          </a:prstGeom>
+          <a:noFill/>
+        </p:spPr>
+        <p:txBody>
+          <a:bodyPr wrap="none">
+            <a:spAutoFit/>
+          </a:bodyPr>
+          <a:lstStyle/>
+          <a:p>
+            <a:pPr algn="ctr"/>
+            <a:r>
+              <a:rPr sz="1000" b="1">
+                <a:solidFill>
+                  <a:srgbClr val="8E44AD"/>
+                </a:solidFill>
+              </a:rPr>
+              <a:t>Новизна проекта</a:t>
             </a:r>
           </a:p>
         </p:txBody>

--- a/docs/Презентация_AD_Blood_Stage.pptx
+++ b/docs/Презентация_AD_Blood_Stage.pptx
@@ -4282,7 +4282,7 @@
                   <a:srgbClr val="E8F0FF"/>
                 </a:solidFill>
               </a:rPr>
-              <a:t>probe  ген</a:t>
+              <a:t>probe → ген</a:t>
             </a:r>
             <a:br/>
             <a:r>
